--- a/presentation/ChartQA-Week1.pptx
+++ b/presentation/ChartQA-Week1.pptx
@@ -6441,7 +6441,7 @@
                 <a:ea typeface="Calibri" pitchFamily="34" charset="-122"/>
                 <a:cs typeface="Calibri" pitchFamily="34" charset="-120"/>
               </a:rPr>
-              <a:t>Measured on RefChartQA at the model's normal input size.</a:t>
+              <a:t>Measured on 7,158 boxes from RefChartQA’s training split, at 512 px.</a:t>
             </a:r>
             <a:endParaRPr lang="en-US" sz="1150" dirty="0"/>
           </a:p>

--- a/presentation/ChartQA-Week1.pptx
+++ b/presentation/ChartQA-Week1.pptx
@@ -8635,7 +8635,7 @@
                           <a:ea typeface="Calibri" pitchFamily="34" charset="-122"/>
                           <a:cs typeface="Calibri" pitchFamily="34" charset="-120"/>
                         </a:rPr>
-                        <a:t>Marks where to look?</a:t>
+                        <a:t>What it marks on the chart</a:t>
                       </a:r>
                       <a:endParaRPr lang="en-US" sz="1400" dirty="0">
                         <a:latin typeface="Calibri" charset="0"/>
@@ -8965,7 +8965,7 @@
                           <a:ea typeface="Calibri" pitchFamily="34" charset="-122"/>
                           <a:cs typeface="Calibri" pitchFamily="34" charset="-120"/>
                         </a:rPr>
-                        <a:t>no</a:t>
+                        <a:t>every element — each bar, each slice</a:t>
                       </a:r>
                       <a:endParaRPr lang="en-US" sz="1400" dirty="0">
                         <a:latin typeface="Calibri" charset="0"/>
@@ -9292,7 +9292,7 @@
                           <a:ea typeface="Calibri" pitchFamily="34" charset="-122"/>
                           <a:cs typeface="Calibri" pitchFamily="34" charset="-120"/>
                         </a:rPr>
-                        <a:t>yes</a:t>
+                        <a:t>the regions each question needs</a:t>
                       </a:r>
                       <a:endParaRPr lang="en-US" sz="1400" dirty="0">
                         <a:latin typeface="Calibri" charset="0"/>
@@ -9382,7 +9382,7 @@
                 <a:ea typeface="Calibri" pitchFamily="34" charset="-122"/>
                 <a:cs typeface="Calibri" pitchFamily="34" charset="-120"/>
               </a:rPr>
-              <a:t>questions with answers, and for one dataset, the regions a good answer should point at</a:t>
+              <a:t>one dataset marks every element in the chart; the other marks what each question needs</a:t>
             </a:r>
             <a:endParaRPr lang="en-US" sz="1450" dirty="0"/>
           </a:p>
